--- a/catalog/samples/evidence_clip_grid.pptx
+++ b/catalog/samples/evidence_clip_grid.pptx
@@ -1472,7 +1472,7 @@
           </a:p>
           <a:p>
             <a:r>
-              <a:t>  "template_sha256": "173102eb56fc6c863e1b20384464c24d033837ca8f1c25e9aae311f83a0aaecb"</a:t>
+              <a:t>  "template_sha256": "549b7cf0120d644b4cc306378c0b9b17fd01719b311a082982d04494d3c3f772"</a:t>
             </a:r>
           </a:p>
           <a:p>
